--- a/pptx-asset-library/decks/01_tables/TBL_bulk_compact_v1.pptx
+++ b/pptx-asset-library/decks/01_tables/TBL_bulk_compact_v1.pptx
@@ -3183,7 +3183,7 @@
           <a:graphicData uri="http://schemas.openxmlformats.org/drawingml/2006/table">
             <a:tbl>
               <a:tblPr>
-                <a:tableStyleId>{2D5ABB26-0587-4C30-8999-92F81FD0307C}</a:tableStyleId>
+                <a:tableStyleId>{5C22544A-7EE6-4342-B048-85BDC9FD1C3A}</a:tableStyleId>
               </a:tblPr>
               <a:tblGrid>
                 <a:gridCol w="1947672"/>
@@ -5246,7 +5246,7 @@
           <a:graphicData uri="http://schemas.openxmlformats.org/drawingml/2006/table">
             <a:tbl>
               <a:tblPr>
-                <a:tableStyleId>{2D5ABB26-0587-4C30-8999-92F81FD0307C}</a:tableStyleId>
+                <a:tableStyleId>{5C22544A-7EE6-4342-B048-85BDC9FD1C3A}</a:tableStyleId>
               </a:tblPr>
               <a:tblGrid>
                 <a:gridCol w="1947672"/>
@@ -7625,7 +7625,7 @@
           <a:graphicData uri="http://schemas.openxmlformats.org/drawingml/2006/table">
             <a:tbl>
               <a:tblPr>
-                <a:tableStyleId>{2D5ABB26-0587-4C30-8999-92F81FD0307C}</a:tableStyleId>
+                <a:tableStyleId>{5C22544A-7EE6-4342-B048-85BDC9FD1C3A}</a:tableStyleId>
               </a:tblPr>
               <a:tblGrid>
                 <a:gridCol w="1947672"/>
@@ -10320,7 +10320,7 @@
           <a:graphicData uri="http://schemas.openxmlformats.org/drawingml/2006/table">
             <a:tbl>
               <a:tblPr>
-                <a:tableStyleId>{2D5ABB26-0587-4C30-8999-92F81FD0307C}</a:tableStyleId>
+                <a:tableStyleId>{5C22544A-7EE6-4342-B048-85BDC9FD1C3A}</a:tableStyleId>
               </a:tblPr>
               <a:tblGrid>
                 <a:gridCol w="1947672"/>
@@ -12655,7 +12655,7 @@
           <a:graphicData uri="http://schemas.openxmlformats.org/drawingml/2006/table">
             <a:tbl>
               <a:tblPr>
-                <a:tableStyleId>{2D5ABB26-0587-4C30-8999-92F81FD0307C}</a:tableStyleId>
+                <a:tableStyleId>{5C22544A-7EE6-4342-B048-85BDC9FD1C3A}</a:tableStyleId>
               </a:tblPr>
               <a:tblGrid>
                 <a:gridCol w="1947672"/>
@@ -15351,7 +15351,7 @@
           <a:graphicData uri="http://schemas.openxmlformats.org/drawingml/2006/table">
             <a:tbl>
               <a:tblPr>
-                <a:tableStyleId>{2D5ABB26-0587-4C30-8999-92F81FD0307C}</a:tableStyleId>
+                <a:tableStyleId>{5C22544A-7EE6-4342-B048-85BDC9FD1C3A}</a:tableStyleId>
               </a:tblPr>
               <a:tblGrid>
                 <a:gridCol w="1947672"/>
